--- a/윤상훈_한국교육파트너스_운영매니저_지원Deck.pptx
+++ b/윤상훈_한국교육파트너스_운영매니저_지원Deck.pptx
@@ -3034,8 +3034,8 @@
         </p:nvSpPr>
         <p:spPr>
           <a:xfrm>
-            <a:off x="457200" y="2788920"/>
-            <a:ext cx="8229600" cy="365760"/>
+            <a:off x="457200" y="2700000"/>
+            <a:ext cx="8229600" cy="500000"/>
           </a:xfrm>
           <a:prstGeom prst="rect">
             <a:avLst/>
@@ -3073,8 +3073,8 @@
         </p:nvSpPr>
         <p:spPr>
           <a:xfrm>
-            <a:off x="457200" y="3200400"/>
-            <a:ext cx="7315200" cy="640080"/>
+            <a:off x="457200" y="3340000"/>
+            <a:ext cx="7315200" cy="800000"/>
           </a:xfrm>
           <a:prstGeom prst="rect">
             <a:avLst/>
@@ -3088,7 +3088,7 @@
           <a:p>
             <a:pPr indent="0" marL="0">
               <a:lnSpc>
-                <a:spcPct val="150000"/>
+                <a:spcPct val="160000"/>
               </a:lnSpc>
               <a:buNone/>
             </a:pPr>
@@ -3108,7 +3108,7 @@
           <a:p>
             <a:pPr indent="0" marL="0">
               <a:lnSpc>
-                <a:spcPct val="150000"/>
+                <a:spcPct val="160000"/>
               </a:lnSpc>
               <a:buNone/>
             </a:pPr>
@@ -6678,7 +6678,7 @@
           <a:p>
             <a:pPr indent="0" marL="0">
               <a:lnSpc>
-                <a:spcPct val="150000"/>
+                <a:spcPct val="160000"/>
               </a:lnSpc>
               <a:buNone/>
             </a:pPr>
@@ -6691,7 +6691,7 @@
                 <a:ea typeface="Pretendard" pitchFamily="34" charset="-122"/>
                 <a:cs typeface="Pretendard" pitchFamily="34" charset="-120"/>
               </a:rPr>
-              <a:t>외부 클라이언트 납품용으로 운영 환경에서 작동하도록 설계한 Electron 기반 multi-LLM 파이프라인. 긴 영상에서 반복 발생하는 요약·구간 선별·초안 작성 업무를 단일 도구로 구조화 (자막 추출 → LLM 핵심 구간 식별 → 숏폼 대본·카드뉴스 초안). NDA로 결과물 외부 공개는 제한되며, 면접 시 워크플로 구조 중심으로 설명 가능.</a:t>
+              <a:t>운영 환경에서 작동하는 Electron 기반 multi-LLM 파이프라인. 긴 영상의 요약·구간 선별·초안 작성을 단일 도구로 구조화. 자막 추출 → 핵심 구간 식별 → 숏폼 대본 초안. NDA로 외부 공개는 제한, 면접 시 워크플로 구조 설명 가능.</a:t>
             </a:r>
             <a:endParaRPr lang="en-US" sz="1000" dirty="0"/>
           </a:p>
@@ -6818,7 +6818,7 @@
           <a:p>
             <a:pPr indent="0" marL="0">
               <a:lnSpc>
-                <a:spcPct val="150000"/>
+                <a:spcPct val="160000"/>
               </a:lnSpc>
               <a:buNone/>
             </a:pPr>
@@ -6958,7 +6958,7 @@
           <a:p>
             <a:pPr indent="0" marL="0">
               <a:lnSpc>
-                <a:spcPct val="150000"/>
+                <a:spcPct val="160000"/>
               </a:lnSpc>
               <a:buNone/>
             </a:pPr>
@@ -12841,7 +12841,7 @@
         <p:spPr>
           <a:xfrm>
             <a:off x="457200" y="1691640"/>
-            <a:ext cx="640080" cy="640000"/>
+            <a:ext cx="640080" cy="670000"/>
           </a:xfrm>
           <a:prstGeom prst="rect">
             <a:avLst/>
@@ -12868,7 +12868,7 @@
         <p:spPr>
           <a:xfrm>
             <a:off x="457200" y="1691640"/>
-            <a:ext cx="640080" cy="640000"/>
+            <a:ext cx="640080" cy="670000"/>
           </a:xfrm>
           <a:prstGeom prst="rect">
             <a:avLst/>
@@ -12907,7 +12907,7 @@
         <p:spPr>
           <a:xfrm>
             <a:off x="1097280" y="1691640"/>
-            <a:ext cx="7589520" cy="640000"/>
+            <a:ext cx="7589520" cy="670000"/>
           </a:xfrm>
           <a:prstGeom prst="rect">
             <a:avLst/>
@@ -12933,7 +12933,7 @@
         </p:nvSpPr>
         <p:spPr>
           <a:xfrm>
-            <a:off x="1280160" y="1737360"/>
+            <a:off x="1280160" y="1751640"/>
             <a:ext cx="7220000" cy="250000"/>
           </a:xfrm>
           <a:prstGeom prst="rect">
@@ -12972,8 +12972,8 @@
         </p:nvSpPr>
         <p:spPr>
           <a:xfrm>
-            <a:off x="1280160" y="2012360"/>
-            <a:ext cx="7220000" cy="305000"/>
+            <a:off x="1280160" y="2011640"/>
+            <a:ext cx="7220000" cy="320000"/>
           </a:xfrm>
           <a:prstGeom prst="rect">
             <a:avLst/>
@@ -12987,7 +12987,7 @@
           <a:p>
             <a:pPr indent="0" marL="0">
               <a:lnSpc>
-                <a:spcPct val="130000"/>
+                <a:spcPct val="150000"/>
               </a:lnSpc>
               <a:buNone/>
             </a:pPr>
@@ -13000,7 +13000,7 @@
                 <a:ea typeface="Pretendard" pitchFamily="34" charset="-122"/>
                 <a:cs typeface="Pretendard" pitchFamily="34" charset="-120"/>
               </a:rPr>
-              <a:t>문의 내용을 수업 일정 / 결제 / 컨설턴트 / 학습 피드백 / 진로 상담 등으로 LLM 1차 분류. 반복 이슈를 주간 리포트화해 패턴 파악과 우선순위 대응 지원.</a:t>
+              <a:t>문의를 수업 일정·결제·컨설턴트·학습 피드백·진로 상담 등으로 LLM 1차 분류. 반복 이슈를 주간 리포트화해 패턴 파악·우선순위 대응 지원.</a:t>
             </a:r>
             <a:endParaRPr lang="en-US" sz="900" dirty="0"/>
           </a:p>
@@ -13014,8 +13014,8 @@
         </p:nvSpPr>
         <p:spPr>
           <a:xfrm>
-            <a:off x="457200" y="2407947"/>
-            <a:ext cx="640080" cy="640000"/>
+            <a:off x="457200" y="2387760"/>
+            <a:ext cx="640080" cy="670000"/>
           </a:xfrm>
           <a:prstGeom prst="rect">
             <a:avLst/>
@@ -13041,8 +13041,8 @@
         </p:nvSpPr>
         <p:spPr>
           <a:xfrm>
-            <a:off x="457200" y="2407947"/>
-            <a:ext cx="640080" cy="640000"/>
+            <a:off x="457200" y="2387760"/>
+            <a:ext cx="640080" cy="670000"/>
           </a:xfrm>
           <a:prstGeom prst="rect">
             <a:avLst/>
@@ -13080,8 +13080,8 @@
         </p:nvSpPr>
         <p:spPr>
           <a:xfrm>
-            <a:off x="1097280" y="2407947"/>
-            <a:ext cx="7589520" cy="640000"/>
+            <a:off x="1097280" y="2387760"/>
+            <a:ext cx="7589520" cy="670000"/>
           </a:xfrm>
           <a:prstGeom prst="rect">
             <a:avLst/>
@@ -13107,7 +13107,7 @@
         </p:nvSpPr>
         <p:spPr>
           <a:xfrm>
-            <a:off x="1280160" y="2453667"/>
+            <a:off x="1280160" y="2447760"/>
             <a:ext cx="7220000" cy="250000"/>
           </a:xfrm>
           <a:prstGeom prst="rect">
@@ -13146,8 +13146,8 @@
         </p:nvSpPr>
         <p:spPr>
           <a:xfrm>
-            <a:off x="1280160" y="2728667"/>
-            <a:ext cx="7220000" cy="305000"/>
+            <a:off x="1280160" y="2707760"/>
+            <a:ext cx="7220000" cy="320000"/>
           </a:xfrm>
           <a:prstGeom prst="rect">
             <a:avLst/>
@@ -13161,7 +13161,7 @@
           <a:p>
             <a:pPr indent="0" marL="0">
               <a:lnSpc>
-                <a:spcPct val="130000"/>
+                <a:spcPct val="150000"/>
               </a:lnSpc>
               <a:buNone/>
             </a:pPr>
@@ -13188,8 +13188,8 @@
         </p:nvSpPr>
         <p:spPr>
           <a:xfrm>
-            <a:off x="457200" y="3124254"/>
-            <a:ext cx="640080" cy="640000"/>
+            <a:off x="457200" y="3083880"/>
+            <a:ext cx="640080" cy="670000"/>
           </a:xfrm>
           <a:prstGeom prst="rect">
             <a:avLst/>
@@ -13215,8 +13215,8 @@
         </p:nvSpPr>
         <p:spPr>
           <a:xfrm>
-            <a:off x="457200" y="3124254"/>
-            <a:ext cx="640080" cy="640000"/>
+            <a:off x="457200" y="3083880"/>
+            <a:ext cx="640080" cy="670000"/>
           </a:xfrm>
           <a:prstGeom prst="rect">
             <a:avLst/>
@@ -13254,8 +13254,8 @@
         </p:nvSpPr>
         <p:spPr>
           <a:xfrm>
-            <a:off x="1097280" y="3124254"/>
-            <a:ext cx="7589520" cy="640000"/>
+            <a:off x="1097280" y="3083880"/>
+            <a:ext cx="7589520" cy="670000"/>
           </a:xfrm>
           <a:prstGeom prst="rect">
             <a:avLst/>
@@ -13281,7 +13281,7 @@
         </p:nvSpPr>
         <p:spPr>
           <a:xfrm>
-            <a:off x="1280160" y="3169974"/>
+            <a:off x="1280160" y="3143880"/>
             <a:ext cx="7220000" cy="250000"/>
           </a:xfrm>
           <a:prstGeom prst="rect">
@@ -13320,8 +13320,8 @@
         </p:nvSpPr>
         <p:spPr>
           <a:xfrm>
-            <a:off x="1280160" y="3444974"/>
-            <a:ext cx="7220000" cy="305000"/>
+            <a:off x="1280160" y="3403880"/>
+            <a:ext cx="7220000" cy="320000"/>
           </a:xfrm>
           <a:prstGeom prst="rect">
             <a:avLst/>
@@ -13335,7 +13335,7 @@
           <a:p>
             <a:pPr indent="0" marL="0">
               <a:lnSpc>
-                <a:spcPct val="130000"/>
+                <a:spcPct val="150000"/>
               </a:lnSpc>
               <a:buNone/>
             </a:pPr>
@@ -13362,8 +13362,8 @@
         </p:nvSpPr>
         <p:spPr>
           <a:xfrm>
-            <a:off x="457200" y="3840561"/>
-            <a:ext cx="640080" cy="640000"/>
+            <a:off x="457200" y="3780000"/>
+            <a:ext cx="640080" cy="670000"/>
           </a:xfrm>
           <a:prstGeom prst="rect">
             <a:avLst/>
@@ -13389,8 +13389,8 @@
         </p:nvSpPr>
         <p:spPr>
           <a:xfrm>
-            <a:off x="457200" y="3840561"/>
-            <a:ext cx="640080" cy="640000"/>
+            <a:off x="457200" y="3780000"/>
+            <a:ext cx="640080" cy="670000"/>
           </a:xfrm>
           <a:prstGeom prst="rect">
             <a:avLst/>
@@ -13428,8 +13428,8 @@
         </p:nvSpPr>
         <p:spPr>
           <a:xfrm>
-            <a:off x="1097280" y="3840561"/>
-            <a:ext cx="7589520" cy="640000"/>
+            <a:off x="1097280" y="3780000"/>
+            <a:ext cx="7589520" cy="670000"/>
           </a:xfrm>
           <a:prstGeom prst="rect">
             <a:avLst/>
@@ -13455,7 +13455,7 @@
         </p:nvSpPr>
         <p:spPr>
           <a:xfrm>
-            <a:off x="1280160" y="3886281"/>
+            <a:off x="1280160" y="3840000"/>
             <a:ext cx="7220000" cy="250000"/>
           </a:xfrm>
           <a:prstGeom prst="rect">
@@ -13494,8 +13494,8 @@
         </p:nvSpPr>
         <p:spPr>
           <a:xfrm>
-            <a:off x="1280160" y="4161281"/>
-            <a:ext cx="7220000" cy="305000"/>
+            <a:off x="1280160" y="4100000"/>
+            <a:ext cx="7220000" cy="320000"/>
           </a:xfrm>
           <a:prstGeom prst="rect">
             <a:avLst/>
@@ -13509,7 +13509,7 @@
           <a:p>
             <a:pPr indent="0" marL="0">
               <a:lnSpc>
-                <a:spcPct val="130000"/>
+                <a:spcPct val="150000"/>
               </a:lnSpc>
               <a:buNone/>
             </a:pPr>
@@ -13574,7 +13574,7 @@
           <a:p>
             <a:pPr indent="0" marL="0">
               <a:lnSpc>
-                <a:spcPct val="130000"/>
+                <a:spcPct val="150000"/>
               </a:lnSpc>
               <a:buNone/>
             </a:pPr>
@@ -13591,7 +13591,7 @@
             </a:r>
             <a:pPr indent="0" marL="0">
               <a:lnSpc>
-                <a:spcPct val="130000"/>
+                <a:spcPct val="150000"/>
               </a:lnSpc>
               <a:buNone/>
             </a:pPr>
